--- a/src/vendor/templates/bhm2026-slide-template.pptx
+++ b/src/vendor/templates/bhm2026-slide-template.pptx
@@ -4991,7 +4991,7 @@
                   <a:srgbClr val="E2AE45"/>
                 </a:solidFill>
               </a:rPr>
-              <a:t>One thing to do this week · Find more in the Black History Month 2026 Hub</a:t>
+              <a:t>One thing to do this week · Find more in the Black History and Heritage Hub</a:t>
             </a:r>
             <a:endParaRPr lang="en-US" sz="2000" dirty="0"/>
           </a:p>
